--- a/example/example1.pptx
+++ b/example/example1.pptx
@@ -4330,7 +4330,7 @@
                 <a:latin typeface="Roboto Mono" pitchFamily="49" charset="0"/>
                 <a:ea typeface="Roboto Mono" pitchFamily="49" charset="0"/>
               </a:rPr>
-              <a:t>@</a:t>
+              <a:t>#!</a:t>
             </a:r>
             <a:r>
               <a:rPr lang="en-US" b="1" dirty="0" err="1">

--- a/example/example1.pptx
+++ b/example/example1.pptx
@@ -3727,7 +3727,7 @@
         <p:spPr>
           <a:xfrm>
             <a:off x="385548" y="206177"/>
-            <a:ext cx="5346512" cy="3970318"/>
+            <a:ext cx="5346512" cy="4185761"/>
           </a:xfrm>
           <a:prstGeom prst="rect">
             <a:avLst/>
@@ -3830,6 +3830,15 @@
                 <a:ea typeface="Roboto Mono" pitchFamily="49" charset="0"/>
               </a:rPr>
               <a:t>// The Interface: Tells the compiler what a 'Cat' is.</a:t>
+            </a:r>
+          </a:p>
+          <a:p>
+            <a:r>
+              <a:rPr lang="en-US" sz="1400" dirty="0">
+                <a:latin typeface="Roboto Mono" pitchFamily="49" charset="0"/>
+                <a:ea typeface="Roboto Mono" pitchFamily="49" charset="0"/>
+              </a:rPr>
+              <a:t>// Very important :)</a:t>
             </a:r>
           </a:p>
           <a:p>
@@ -4143,7 +4152,7 @@
         <p:spPr>
           <a:xfrm>
             <a:off x="412843" y="460851"/>
-            <a:ext cx="7366380" cy="2246769"/>
+            <a:ext cx="7366380" cy="1815882"/>
           </a:xfrm>
           <a:prstGeom prst="rect">
             <a:avLst/>
@@ -4215,14 +4224,8 @@
                 <a:latin typeface="Roboto Mono" pitchFamily="49" charset="0"/>
                 <a:ea typeface="Roboto Mono" pitchFamily="49" charset="0"/>
               </a:rPr>
-              <a:t>" // Crucial: Link the implementation to the header</a:t>
-            </a:r>
-          </a:p>
-          <a:p>
-            <a:endParaRPr lang="en-US" sz="1400" dirty="0">
-              <a:latin typeface="Roboto Mono" pitchFamily="49" charset="0"/>
-              <a:ea typeface="Roboto Mono" pitchFamily="49" charset="0"/>
-            </a:endParaRPr>
+              <a:t>"</a:t>
+            </a:r>
           </a:p>
           <a:p>
             <a:r>
@@ -4812,7 +4815,7 @@
                 <a:latin typeface="Roboto Mono" pitchFamily="49" charset="0"/>
                 <a:ea typeface="Roboto Mono" pitchFamily="49" charset="0"/>
               </a:rPr>
-              <a:t>// :)</a:t>
+              <a:t>// :(</a:t>
             </a:r>
           </a:p>
         </p:txBody>
@@ -5341,12 +5344,16 @@
           </a:p>
           <a:p>
             <a:r>
-              <a:rPr lang="en-US" sz="1400" dirty="0">
-                <a:latin typeface="Roboto Mono" pitchFamily="49" charset="0"/>
-                <a:ea typeface="Roboto Mono" pitchFamily="49" charset="0"/>
-              </a:rPr>
-              <a:t>// 1</a:t>
-            </a:r>
+              <a:rPr lang="en-US" sz="1400">
+                <a:latin typeface="Roboto Mono" pitchFamily="49" charset="0"/>
+                <a:ea typeface="Roboto Mono" pitchFamily="49" charset="0"/>
+              </a:rPr>
+              <a:t>// 3</a:t>
+            </a:r>
+            <a:endParaRPr lang="en-US" sz="1400" dirty="0">
+              <a:latin typeface="Roboto Mono" pitchFamily="49" charset="0"/>
+              <a:ea typeface="Roboto Mono" pitchFamily="49" charset="0"/>
+            </a:endParaRPr>
           </a:p>
         </p:txBody>
       </p:sp>
